--- a/exports/pptx/lessons/primary-module-08-yoga/day-06-animal-walk.pptx
+++ b/exports/pptx/lessons/primary-module-08-yoga/day-06-animal-walk.pptx
@@ -16,9 +16,12 @@
     <p:sldId id="264" r:id="rId10"/>
     <p:sldId id="265" r:id="rId11"/>
     <p:sldId id="266" r:id="rId12"/>
+    <p:sldId id="267" r:id="rId13"/>
+    <p:sldId id="268" r:id="rId14"/>
+    <p:sldId id="269" r:id="rId15"/>
   </p:sldIdLst>
   <p:notesMasterIdLst>
-    <p:notesMasterId r:id="rId13"/>
+    <p:notesMasterId r:id="rId16"/>
   </p:notesMasterIdLst>
   <p:sldSz cx="9144000" cy="5143500"/>
   <p:notesSz cx="5143500" cy="9144000"/>
@@ -712,6 +715,270 @@
             <a:fld id="{F7021451-1387-4CA6-816F-3879F97B5CBC}" type="slidenum">
               <a:rPr lang="en-US"/>
               <a:t>11</a:t>
+            </a:fld>
+            <a:endParaRPr lang="en-US"/>
+          </a:p>
+        </p:txBody>
+      </p:sp>
+    </p:spTree>
+    <p:extLst>
+      <p:ext uri="{BB962C8B-B14F-4D97-AF65-F5344CB8AC3E}">
+        <p14:creationId xmlns:p14="http://schemas.microsoft.com/office/powerpoint/2010/main" val="1024086991"/>
+      </p:ext>
+    </p:extLst>
+  </p:cSld>
+  <p:clrMapOvr>
+    <a:masterClrMapping/>
+  </p:clrMapOvr>
+</p:notes>
+</file>
+
+<file path=ppt/notesSlides/notesSlide12.xml><?xml version="1.0" encoding="utf-8"?>
+<p:notes xmlns:a="http://schemas.openxmlformats.org/drawingml/2006/main" xmlns:r="http://schemas.openxmlformats.org/officeDocument/2006/relationships" xmlns:p="http://schemas.openxmlformats.org/presentationml/2006/main">
+  <p:cSld>
+    <p:spTree>
+      <p:nvGrpSpPr>
+        <p:cNvPr id="1" name=""/>
+        <p:cNvGrpSpPr/>
+        <p:nvPr/>
+      </p:nvGrpSpPr>
+      <p:grpSpPr>
+        <a:xfrm>
+          <a:off x="0" y="0"/>
+          <a:ext cx="0" cy="0"/>
+          <a:chOff x="0" y="0"/>
+          <a:chExt cx="0" cy="0"/>
+        </a:xfrm>
+      </p:grpSpPr>
+      <p:sp>
+        <p:nvSpPr>
+          <p:cNvPr id="2" name="Slide Image Placeholder 1"/>
+          <p:cNvSpPr>
+            <a:spLocks noGrp="1" noRot="1" noChangeAspect="1"/>
+          </p:cNvSpPr>
+          <p:nvPr>
+            <p:ph type="sldImg"/>
+          </p:nvPr>
+        </p:nvSpPr>
+        <p:spPr/>
+      </p:sp>
+      <p:sp>
+        <p:nvSpPr>
+          <p:cNvPr id="3" name="Notes Placeholder 2"/>
+          <p:cNvSpPr>
+            <a:spLocks noGrp="1"/>
+          </p:cNvSpPr>
+          <p:nvPr>
+            <p:ph type="body" idx="1"/>
+          </p:nvPr>
+        </p:nvSpPr>
+        <p:spPr/>
+        <p:txBody>
+          <a:bodyPr/>
+          <a:lstStyle/>
+          <a:p>
+            <a:r>
+              <a:rPr lang="en-US" dirty="0"/>
+              <a:t/>
+            </a:r>
+            <a:endParaRPr lang="en-US" dirty="0"/>
+          </a:p>
+        </p:txBody>
+      </p:sp>
+      <p:sp>
+        <p:nvSpPr>
+          <p:cNvPr id="4" name="Slide Number Placeholder 3"/>
+          <p:cNvSpPr>
+            <a:spLocks noGrp="1"/>
+          </p:cNvSpPr>
+          <p:nvPr>
+            <p:ph type="sldNum" sz="quarter" idx="10"/>
+          </p:nvPr>
+        </p:nvSpPr>
+        <p:spPr/>
+        <p:txBody>
+          <a:bodyPr/>
+          <a:lstStyle/>
+          <a:p>
+            <a:fld id="{F7021451-1387-4CA6-816F-3879F97B5CBC}" type="slidenum">
+              <a:rPr lang="en-US"/>
+              <a:t>12</a:t>
+            </a:fld>
+            <a:endParaRPr lang="en-US"/>
+          </a:p>
+        </p:txBody>
+      </p:sp>
+    </p:spTree>
+    <p:extLst>
+      <p:ext uri="{BB962C8B-B14F-4D97-AF65-F5344CB8AC3E}">
+        <p14:creationId xmlns:p14="http://schemas.microsoft.com/office/powerpoint/2010/main" val="1024086991"/>
+      </p:ext>
+    </p:extLst>
+  </p:cSld>
+  <p:clrMapOvr>
+    <a:masterClrMapping/>
+  </p:clrMapOvr>
+</p:notes>
+</file>
+
+<file path=ppt/notesSlides/notesSlide13.xml><?xml version="1.0" encoding="utf-8"?>
+<p:notes xmlns:a="http://schemas.openxmlformats.org/drawingml/2006/main" xmlns:r="http://schemas.openxmlformats.org/officeDocument/2006/relationships" xmlns:p="http://schemas.openxmlformats.org/presentationml/2006/main">
+  <p:cSld>
+    <p:spTree>
+      <p:nvGrpSpPr>
+        <p:cNvPr id="1" name=""/>
+        <p:cNvGrpSpPr/>
+        <p:nvPr/>
+      </p:nvGrpSpPr>
+      <p:grpSpPr>
+        <a:xfrm>
+          <a:off x="0" y="0"/>
+          <a:ext cx="0" cy="0"/>
+          <a:chOff x="0" y="0"/>
+          <a:chExt cx="0" cy="0"/>
+        </a:xfrm>
+      </p:grpSpPr>
+      <p:sp>
+        <p:nvSpPr>
+          <p:cNvPr id="2" name="Slide Image Placeholder 1"/>
+          <p:cNvSpPr>
+            <a:spLocks noGrp="1" noRot="1" noChangeAspect="1"/>
+          </p:cNvSpPr>
+          <p:nvPr>
+            <p:ph type="sldImg"/>
+          </p:nvPr>
+        </p:nvSpPr>
+        <p:spPr/>
+      </p:sp>
+      <p:sp>
+        <p:nvSpPr>
+          <p:cNvPr id="3" name="Notes Placeholder 2"/>
+          <p:cNvSpPr>
+            <a:spLocks noGrp="1"/>
+          </p:cNvSpPr>
+          <p:nvPr>
+            <p:ph type="body" idx="1"/>
+          </p:nvPr>
+        </p:nvSpPr>
+        <p:spPr/>
+        <p:txBody>
+          <a:bodyPr/>
+          <a:lstStyle/>
+          <a:p>
+            <a:r>
+              <a:rPr lang="en-US" dirty="0"/>
+              <a:t/>
+            </a:r>
+            <a:endParaRPr lang="en-US" dirty="0"/>
+          </a:p>
+        </p:txBody>
+      </p:sp>
+      <p:sp>
+        <p:nvSpPr>
+          <p:cNvPr id="4" name="Slide Number Placeholder 3"/>
+          <p:cNvSpPr>
+            <a:spLocks noGrp="1"/>
+          </p:cNvSpPr>
+          <p:nvPr>
+            <p:ph type="sldNum" sz="quarter" idx="10"/>
+          </p:nvPr>
+        </p:nvSpPr>
+        <p:spPr/>
+        <p:txBody>
+          <a:bodyPr/>
+          <a:lstStyle/>
+          <a:p>
+            <a:fld id="{F7021451-1387-4CA6-816F-3879F97B5CBC}" type="slidenum">
+              <a:rPr lang="en-US"/>
+              <a:t>13</a:t>
+            </a:fld>
+            <a:endParaRPr lang="en-US"/>
+          </a:p>
+        </p:txBody>
+      </p:sp>
+    </p:spTree>
+    <p:extLst>
+      <p:ext uri="{BB962C8B-B14F-4D97-AF65-F5344CB8AC3E}">
+        <p14:creationId xmlns:p14="http://schemas.microsoft.com/office/powerpoint/2010/main" val="1024086991"/>
+      </p:ext>
+    </p:extLst>
+  </p:cSld>
+  <p:clrMapOvr>
+    <a:masterClrMapping/>
+  </p:clrMapOvr>
+</p:notes>
+</file>
+
+<file path=ppt/notesSlides/notesSlide14.xml><?xml version="1.0" encoding="utf-8"?>
+<p:notes xmlns:a="http://schemas.openxmlformats.org/drawingml/2006/main" xmlns:r="http://schemas.openxmlformats.org/officeDocument/2006/relationships" xmlns:p="http://schemas.openxmlformats.org/presentationml/2006/main">
+  <p:cSld>
+    <p:spTree>
+      <p:nvGrpSpPr>
+        <p:cNvPr id="1" name=""/>
+        <p:cNvGrpSpPr/>
+        <p:nvPr/>
+      </p:nvGrpSpPr>
+      <p:grpSpPr>
+        <a:xfrm>
+          <a:off x="0" y="0"/>
+          <a:ext cx="0" cy="0"/>
+          <a:chOff x="0" y="0"/>
+          <a:chExt cx="0" cy="0"/>
+        </a:xfrm>
+      </p:grpSpPr>
+      <p:sp>
+        <p:nvSpPr>
+          <p:cNvPr id="2" name="Slide Image Placeholder 1"/>
+          <p:cNvSpPr>
+            <a:spLocks noGrp="1" noRot="1" noChangeAspect="1"/>
+          </p:cNvSpPr>
+          <p:nvPr>
+            <p:ph type="sldImg"/>
+          </p:nvPr>
+        </p:nvSpPr>
+        <p:spPr/>
+      </p:sp>
+      <p:sp>
+        <p:nvSpPr>
+          <p:cNvPr id="3" name="Notes Placeholder 2"/>
+          <p:cNvSpPr>
+            <a:spLocks noGrp="1"/>
+          </p:cNvSpPr>
+          <p:nvPr>
+            <p:ph type="body" idx="1"/>
+          </p:nvPr>
+        </p:nvSpPr>
+        <p:spPr/>
+        <p:txBody>
+          <a:bodyPr/>
+          <a:lstStyle/>
+          <a:p>
+            <a:r>
+              <a:rPr lang="en-US" dirty="0"/>
+              <a:t/>
+            </a:r>
+            <a:endParaRPr lang="en-US" dirty="0"/>
+          </a:p>
+        </p:txBody>
+      </p:sp>
+      <p:sp>
+        <p:nvSpPr>
+          <p:cNvPr id="4" name="Slide Number Placeholder 3"/>
+          <p:cNvSpPr>
+            <a:spLocks noGrp="1"/>
+          </p:cNvSpPr>
+          <p:nvPr>
+            <p:ph type="sldNum" sz="quarter" idx="10"/>
+          </p:nvPr>
+        </p:nvSpPr>
+        <p:spPr/>
+        <p:txBody>
+          <a:bodyPr/>
+          <a:lstStyle/>
+          <a:p>
+            <a:fld id="{F7021451-1387-4CA6-816F-3879F97B5CBC}" type="slidenum">
+              <a:rPr lang="en-US"/>
+              <a:t>14</a:t>
             </a:fld>
             <a:endParaRPr lang="en-US"/>
           </a:p>
@@ -1965,102 +2232,6 @@
         </p:nvSpPr>
         <p:spPr>
           <a:xfrm>
-            <a:off x="406301" y="1223963"/>
-            <a:ext cx="8498026" cy="274290"/>
-          </a:xfrm>
-          <a:prstGeom prst="rect">
-            <a:avLst/>
-          </a:prstGeom>
-          <a:noFill/>
-          <a:ln/>
-        </p:spPr>
-        <p:txBody>
-          <a:bodyPr wrap="square" lIns="0" tIns="0" rIns="0" bIns="0" rtlCol="0" anchor="t"/>
-          <a:lstStyle/>
-          <a:p>
-            <a:pPr algn="l" indent="0" marL="0">
-              <a:lnSpc>
-                <a:spcPts val="2160"/>
-              </a:lnSpc>
-              <a:spcBef>
-                <a:spcPts val="600"/>
-              </a:spcBef>
-              <a:spcAft>
-                <a:spcPts val="800"/>
-              </a:spcAft>
-              <a:buNone/>
-            </a:pPr>
-            <a:r>
-              <a:rPr lang="en-US" sz="1800" b="1" dirty="0">
-                <a:solidFill>
-                  <a:srgbClr val="E07A5F"/>
-                </a:solidFill>
-                <a:latin typeface="Georgia" pitchFamily="34" charset="0"/>
-                <a:ea typeface="Georgia" pitchFamily="34" charset="-122"/>
-                <a:cs typeface="Georgia" pitchFamily="34" charset="-120"/>
-              </a:rPr>
-              <a:t>Goal</a:t>
-            </a:r>
-            <a:endParaRPr lang="en-US" sz="1800" dirty="0"/>
-          </a:p>
-        </p:txBody>
-      </p:sp>
-      <p:sp>
-        <p:nvSpPr>
-          <p:cNvPr id="6" name="Text 4"/>
-          <p:cNvSpPr/>
-          <p:nvPr/>
-        </p:nvSpPr>
-        <p:spPr>
-          <a:xfrm>
-            <a:off x="406301" y="1637854"/>
-            <a:ext cx="8498026" cy="213271"/>
-          </a:xfrm>
-          <a:prstGeom prst="rect">
-            <a:avLst/>
-          </a:prstGeom>
-          <a:noFill/>
-          <a:ln/>
-        </p:spPr>
-        <p:txBody>
-          <a:bodyPr wrap="square" lIns="0" tIns="0" rIns="0" bIns="0" rtlCol="0" anchor="t"/>
-          <a:lstStyle/>
-          <a:p>
-            <a:pPr algn="l" indent="0" marL="0">
-              <a:lnSpc>
-                <a:spcPts val="1680"/>
-              </a:lnSpc>
-              <a:spcBef>
-                <a:spcPts val="300"/>
-              </a:spcBef>
-              <a:spcAft>
-                <a:spcPts val="300"/>
-              </a:spcAft>
-              <a:buNone/>
-            </a:pPr>
-            <a:r>
-              <a:rPr lang="en-US" sz="1200" dirty="0">
-                <a:solidFill>
-                  <a:srgbClr val="2C2C2C"/>
-                </a:solidFill>
-                <a:latin typeface="Verdana" pitchFamily="34" charset="0"/>
-                <a:ea typeface="Verdana" pitchFamily="34" charset="-122"/>
-                <a:cs typeface="Verdana" pitchFamily="34" charset="-120"/>
-              </a:rPr>
-              <a:t>Children flow through all 5 poses + bhrāmarī as a sequence, animal-style.</a:t>
-            </a:r>
-            <a:endParaRPr lang="en-US" sz="1200" dirty="0"/>
-          </a:p>
-        </p:txBody>
-      </p:sp>
-      <p:sp>
-        <p:nvSpPr>
-          <p:cNvPr id="7" name="Text 5"/>
-          <p:cNvSpPr/>
-          <p:nvPr/>
-        </p:nvSpPr>
-        <p:spPr>
-          <a:xfrm>
             <a:off x="406301" y="4434929"/>
             <a:ext cx="8498026" cy="213271"/>
           </a:xfrm>
@@ -2205,7 +2376,7 @@
                 <a:ea typeface="Georgia" pitchFamily="34" charset="-122"/>
                 <a:cs typeface="Georgia" pitchFamily="34" charset="-120"/>
               </a:rPr>
-              <a:t>Differentiation</a:t>
+              <a:t>Reflection (3 min)</a:t>
             </a:r>
             <a:endParaRPr lang="en-US" sz="1800" dirty="0"/>
           </a:p>
@@ -2243,7 +2414,7 @@
               <a:buChar char="•"/>
             </a:pPr>
             <a:r>
-              <a:rPr lang="en-US" sz="1200" b="1" dirty="0">
+              <a:rPr lang="en-US" sz="1200" i="1" dirty="0">
                 <a:solidFill>
                   <a:srgbClr val="2C2C2C"/>
                 </a:solidFill>
@@ -2251,19 +2422,23 @@
                 <a:ea typeface="Verdana" pitchFamily="34" charset="-122"/>
                 <a:cs typeface="Verdana" pitchFamily="34" charset="-120"/>
               </a:rPr>
-              <a:t>Tier up:</a:t>
-            </a:r>
-            <a:pPr algn="l" indent="0" marL="0">
+              <a:t>"Which animal felt best in your body?"</a:t>
+            </a:r>
+            <a:endParaRPr lang="en-US" sz="1200" dirty="0"/>
+          </a:p>
+          <a:p>
+            <a:pPr algn="l" marL="342900" indent="-342900">
               <a:lnSpc>
                 <a:spcPts val="1620"/>
               </a:lnSpc>
               <a:spcAft>
                 <a:spcPts val="300"/>
               </a:spcAft>
-              <a:buNone/>
-            </a:pPr>
-            <a:r>
-              <a:rPr lang="en-US" sz="1200" dirty="0">
+              <a:buSzPct val="100000"/>
+              <a:buChar char="•"/>
+            </a:pPr>
+            <a:r>
+              <a:rPr lang="en-US" sz="1200" i="1" dirty="0">
                 <a:solidFill>
                   <a:srgbClr val="2C2C2C"/>
                 </a:solidFill>
@@ -2271,51 +2446,7 @@
                 <a:ea typeface="Verdana" pitchFamily="34" charset="-122"/>
                 <a:cs typeface="Verdana" pitchFamily="34" charset="-120"/>
               </a:rPr>
-              <a:t> Add 5 more cat-cow rounds OR 5 more bumblebee breaths.</a:t>
-            </a:r>
-            <a:endParaRPr lang="en-US" sz="1200" dirty="0"/>
-          </a:p>
-          <a:p>
-            <a:pPr algn="l" marL="342900" indent="-342900">
-              <a:lnSpc>
-                <a:spcPts val="1620"/>
-              </a:lnSpc>
-              <a:spcAft>
-                <a:spcPts val="300"/>
-              </a:spcAft>
-              <a:buSzPct val="100000"/>
-              <a:buChar char="•"/>
-            </a:pPr>
-            <a:r>
-              <a:rPr lang="en-US" sz="1200" b="1" dirty="0">
-                <a:solidFill>
-                  <a:srgbClr val="2C2C2C"/>
-                </a:solidFill>
-                <a:latin typeface="Verdana" pitchFamily="34" charset="0"/>
-                <a:ea typeface="Verdana" pitchFamily="34" charset="-122"/>
-                <a:cs typeface="Verdana" pitchFamily="34" charset="-120"/>
-              </a:rPr>
-              <a:t>Tier down:</a:t>
-            </a:r>
-            <a:pPr algn="l" indent="0" marL="0">
-              <a:lnSpc>
-                <a:spcPts val="1620"/>
-              </a:lnSpc>
-              <a:spcAft>
-                <a:spcPts val="300"/>
-              </a:spcAft>
-              <a:buNone/>
-            </a:pPr>
-            <a:r>
-              <a:rPr lang="en-US" sz="1200" dirty="0">
-                <a:solidFill>
-                  <a:srgbClr val="2C2C2C"/>
-                </a:solidFill>
-                <a:latin typeface="Verdana" pitchFamily="34" charset="0"/>
-                <a:ea typeface="Verdana" pitchFamily="34" charset="-122"/>
-                <a:cs typeface="Verdana" pitchFamily="34" charset="-120"/>
-              </a:rPr>
-              <a:t> Skip the bumblebee if shy or unwell. Replace with 3 natural breaths in seated.</a:t>
+              <a:t>"Which one was hardest?"</a:t>
             </a:r>
             <a:endParaRPr lang="en-US" sz="1200" dirty="0"/>
           </a:p>
@@ -2473,7 +2604,7 @@
                 <a:ea typeface="Georgia" pitchFamily="34" charset="-122"/>
                 <a:cs typeface="Georgia" pitchFamily="34" charset="-120"/>
               </a:rPr>
-              <a:t>Teacher's quick notes</a:t>
+              <a:t>Close (1 min)</a:t>
             </a:r>
             <a:endParaRPr lang="en-US" sz="1800" dirty="0"/>
           </a:p>
@@ -2488,7 +2619,7 @@
         <p:spPr>
           <a:xfrm>
             <a:off x="406301" y="870942"/>
-            <a:ext cx="8498026" cy="426541"/>
+            <a:ext cx="8498026" cy="213271"/>
           </a:xfrm>
           <a:prstGeom prst="rect">
             <a:avLst/>
@@ -2521,7 +2652,707 @@
                 <a:ea typeface="Verdana" pitchFamily="34" charset="-122"/>
                 <a:cs typeface="Verdana" pitchFamily="34" charset="-120"/>
               </a:rPr>
-              <a:t>– This is the practice rehearsal for the project. Children should know the FLOW now. – Day 7 they'll INVENT a pose to add — preview it: "tomorrow, you'll make UP a pose and give it a name!"</a:t>
+              <a:t>Tāḍāsana. Namaste.</a:t>
+            </a:r>
+            <a:endParaRPr lang="en-US" sz="1200" dirty="0"/>
+          </a:p>
+        </p:txBody>
+      </p:sp>
+      <p:sp>
+        <p:nvSpPr>
+          <p:cNvPr id="5" name="Text 3"/>
+          <p:cNvSpPr/>
+          <p:nvPr/>
+        </p:nvSpPr>
+        <p:spPr>
+          <a:xfrm>
+            <a:off x="406301" y="4434929"/>
+            <a:ext cx="8498026" cy="213271"/>
+          </a:xfrm>
+          <a:prstGeom prst="rect">
+            <a:avLst/>
+          </a:prstGeom>
+          <a:noFill/>
+          <a:ln/>
+        </p:spPr>
+        <p:txBody>
+          <a:bodyPr wrap="square" lIns="0" tIns="0" rIns="0" bIns="0" rtlCol="0" anchor="t"/>
+          <a:lstStyle/>
+          <a:p>
+            <a:pPr algn="l" indent="0" marL="0">
+              <a:lnSpc>
+                <a:spcPts val="1680"/>
+              </a:lnSpc>
+              <a:spcBef>
+                <a:spcPts val="300"/>
+              </a:spcBef>
+              <a:spcAft>
+                <a:spcPts val="300"/>
+              </a:spcAft>
+              <a:buNone/>
+            </a:pPr>
+            <a:r>
+              <a:rPr lang="en-US" sz="1200" dirty="0">
+                <a:solidFill>
+                  <a:srgbClr val="2C2C2C"/>
+                </a:solidFill>
+                <a:latin typeface="Verdana" pitchFamily="34" charset="0"/>
+                <a:ea typeface="Verdana" pitchFamily="34" charset="-122"/>
+                <a:cs typeface="Verdana" pitchFamily="34" charset="-120"/>
+              </a:rPr>
+              <a:t>Primary ·  · IKS Curriculum</a:t>
+            </a:r>
+            <a:endParaRPr lang="en-US" sz="1200" dirty="0"/>
+          </a:p>
+        </p:txBody>
+      </p:sp>
+    </p:spTree>
+  </p:cSld>
+  <p:clrMapOvr>
+    <a:masterClrMapping/>
+  </p:clrMapOvr>
+</p:sld>
+</file>
+
+<file path=ppt/slides/slide12.xml><?xml version="1.0" encoding="utf-8"?>
+<p:sld xmlns:a="http://schemas.openxmlformats.org/drawingml/2006/main" xmlns:r="http://schemas.openxmlformats.org/officeDocument/2006/relationships" xmlns:p="http://schemas.openxmlformats.org/presentationml/2006/main">
+  <p:cSld name="Slide 12">
+    <p:bg>
+      <p:bgPr>
+        <a:solidFill>
+          <a:srgbClr val="FAF7F2"/>
+        </a:solidFill>
+      </p:bgPr>
+    </p:bg>
+    <p:spTree>
+      <p:nvGrpSpPr>
+        <p:cNvPr id="1" name=""/>
+        <p:cNvGrpSpPr/>
+        <p:nvPr/>
+      </p:nvGrpSpPr>
+      <p:grpSpPr>
+        <a:xfrm>
+          <a:off x="0" y="0"/>
+          <a:ext cx="0" cy="0"/>
+          <a:chOff x="0" y="0"/>
+          <a:chExt cx="0" cy="0"/>
+        </a:xfrm>
+      </p:grpSpPr>
+      <p:sp>
+        <p:nvSpPr>
+          <p:cNvPr id="2" name="Text 0"/>
+          <p:cNvSpPr/>
+          <p:nvPr/>
+        </p:nvSpPr>
+        <p:spPr>
+          <a:xfrm>
+            <a:off x="0" y="0"/>
+            <a:ext cx="9144000" cy="101501"/>
+          </a:xfrm>
+          <a:prstGeom prst="rect">
+            <a:avLst/>
+          </a:prstGeom>
+          <a:solidFill>
+            <a:srgbClr val="87A96B"/>
+          </a:solidFill>
+          <a:ln/>
+        </p:spPr>
+        <p:txBody>
+          <a:bodyPr wrap="square" rtlCol="0" anchor="ctr"/>
+          <a:lstStyle/>
+          <a:p>
+            <a:pPr indent="0" marL="0">
+              <a:buNone/>
+            </a:pPr>
+            <a:endParaRPr lang="en-US" dirty="0"/>
+          </a:p>
+        </p:txBody>
+      </p:sp>
+      <p:sp>
+        <p:nvSpPr>
+          <p:cNvPr id="3" name="Text 1"/>
+          <p:cNvSpPr/>
+          <p:nvPr/>
+        </p:nvSpPr>
+        <p:spPr>
+          <a:xfrm>
+            <a:off x="406301" y="457051"/>
+            <a:ext cx="8498026" cy="274290"/>
+          </a:xfrm>
+          <a:prstGeom prst="rect">
+            <a:avLst/>
+          </a:prstGeom>
+          <a:noFill/>
+          <a:ln/>
+        </p:spPr>
+        <p:txBody>
+          <a:bodyPr wrap="square" lIns="0" tIns="0" rIns="0" bIns="0" rtlCol="0" anchor="t"/>
+          <a:lstStyle/>
+          <a:p>
+            <a:pPr algn="l" indent="0" marL="0">
+              <a:lnSpc>
+                <a:spcPts val="2160"/>
+              </a:lnSpc>
+              <a:spcBef>
+                <a:spcPts val="600"/>
+              </a:spcBef>
+              <a:spcAft>
+                <a:spcPts val="800"/>
+              </a:spcAft>
+              <a:buNone/>
+            </a:pPr>
+            <a:r>
+              <a:rPr lang="en-US" sz="1800" b="1" dirty="0">
+                <a:solidFill>
+                  <a:srgbClr val="E07A5F"/>
+                </a:solidFill>
+                <a:latin typeface="Georgia" pitchFamily="34" charset="0"/>
+                <a:ea typeface="Georgia" pitchFamily="34" charset="-122"/>
+                <a:cs typeface="Georgia" pitchFamily="34" charset="-120"/>
+              </a:rPr>
+              <a:t>Homework</a:t>
+            </a:r>
+            <a:endParaRPr lang="en-US" sz="1800" dirty="0"/>
+          </a:p>
+        </p:txBody>
+      </p:sp>
+      <p:sp>
+        <p:nvSpPr>
+          <p:cNvPr id="4" name="Text 2"/>
+          <p:cNvSpPr/>
+          <p:nvPr/>
+        </p:nvSpPr>
+        <p:spPr>
+          <a:xfrm>
+            <a:off x="634901" y="883593"/>
+            <a:ext cx="8102798" cy="281880"/>
+          </a:xfrm>
+          <a:prstGeom prst="rect">
+            <a:avLst/>
+          </a:prstGeom>
+          <a:noFill/>
+          <a:ln/>
+        </p:spPr>
+        <p:txBody>
+          <a:bodyPr wrap="square" lIns="0" tIns="0" rIns="0" bIns="0" rtlCol="0" anchor="t"/>
+          <a:lstStyle/>
+          <a:p>
+            <a:pPr algn="l" marL="342900" indent="-342900">
+              <a:lnSpc>
+                <a:spcPts val="1620"/>
+              </a:lnSpc>
+              <a:spcAft>
+                <a:spcPts val="300"/>
+              </a:spcAft>
+              <a:buSzPct val="100000"/>
+              <a:buChar char="•"/>
+            </a:pPr>
+            <a:r>
+              <a:rPr lang="en-US" sz="1200" dirty="0">
+                <a:solidFill>
+                  <a:srgbClr val="2C2C2C"/>
+                </a:solidFill>
+                <a:latin typeface="Verdana" pitchFamily="34" charset="0"/>
+                <a:ea typeface="Verdana" pitchFamily="34" charset="-122"/>
+                <a:cs typeface="Verdana" pitchFamily="34" charset="-120"/>
+              </a:rPr>
+              <a:t>Practice the full sequence at home — your favourite part TWICE.</a:t>
+            </a:r>
+            <a:endParaRPr lang="en-US" sz="1200" dirty="0"/>
+          </a:p>
+        </p:txBody>
+      </p:sp>
+      <p:sp>
+        <p:nvSpPr>
+          <p:cNvPr id="5" name="Text 3"/>
+          <p:cNvSpPr/>
+          <p:nvPr/>
+        </p:nvSpPr>
+        <p:spPr>
+          <a:xfrm>
+            <a:off x="406301" y="4434929"/>
+            <a:ext cx="8498026" cy="213271"/>
+          </a:xfrm>
+          <a:prstGeom prst="rect">
+            <a:avLst/>
+          </a:prstGeom>
+          <a:noFill/>
+          <a:ln/>
+        </p:spPr>
+        <p:txBody>
+          <a:bodyPr wrap="square" lIns="0" tIns="0" rIns="0" bIns="0" rtlCol="0" anchor="t"/>
+          <a:lstStyle/>
+          <a:p>
+            <a:pPr algn="l" indent="0" marL="0">
+              <a:lnSpc>
+                <a:spcPts val="1680"/>
+              </a:lnSpc>
+              <a:spcBef>
+                <a:spcPts val="300"/>
+              </a:spcBef>
+              <a:spcAft>
+                <a:spcPts val="300"/>
+              </a:spcAft>
+              <a:buNone/>
+            </a:pPr>
+            <a:r>
+              <a:rPr lang="en-US" sz="1200" dirty="0">
+                <a:solidFill>
+                  <a:srgbClr val="2C2C2C"/>
+                </a:solidFill>
+                <a:latin typeface="Verdana" pitchFamily="34" charset="0"/>
+                <a:ea typeface="Verdana" pitchFamily="34" charset="-122"/>
+                <a:cs typeface="Verdana" pitchFamily="34" charset="-120"/>
+              </a:rPr>
+              <a:t>Primary ·  · IKS Curriculum</a:t>
+            </a:r>
+            <a:endParaRPr lang="en-US" sz="1200" dirty="0"/>
+          </a:p>
+        </p:txBody>
+      </p:sp>
+    </p:spTree>
+  </p:cSld>
+  <p:clrMapOvr>
+    <a:masterClrMapping/>
+  </p:clrMapOvr>
+</p:sld>
+</file>
+
+<file path=ppt/slides/slide13.xml><?xml version="1.0" encoding="utf-8"?>
+<p:sld xmlns:a="http://schemas.openxmlformats.org/drawingml/2006/main" xmlns:r="http://schemas.openxmlformats.org/officeDocument/2006/relationships" xmlns:p="http://schemas.openxmlformats.org/presentationml/2006/main">
+  <p:cSld name="Slide 13">
+    <p:bg>
+      <p:bgPr>
+        <a:solidFill>
+          <a:srgbClr val="FAF7F2"/>
+        </a:solidFill>
+      </p:bgPr>
+    </p:bg>
+    <p:spTree>
+      <p:nvGrpSpPr>
+        <p:cNvPr id="1" name=""/>
+        <p:cNvGrpSpPr/>
+        <p:nvPr/>
+      </p:nvGrpSpPr>
+      <p:grpSpPr>
+        <a:xfrm>
+          <a:off x="0" y="0"/>
+          <a:ext cx="0" cy="0"/>
+          <a:chOff x="0" y="0"/>
+          <a:chExt cx="0" cy="0"/>
+        </a:xfrm>
+      </p:grpSpPr>
+      <p:sp>
+        <p:nvSpPr>
+          <p:cNvPr id="2" name="Text 0"/>
+          <p:cNvSpPr/>
+          <p:nvPr/>
+        </p:nvSpPr>
+        <p:spPr>
+          <a:xfrm>
+            <a:off x="0" y="0"/>
+            <a:ext cx="9144000" cy="101501"/>
+          </a:xfrm>
+          <a:prstGeom prst="rect">
+            <a:avLst/>
+          </a:prstGeom>
+          <a:solidFill>
+            <a:srgbClr val="87A96B"/>
+          </a:solidFill>
+          <a:ln/>
+        </p:spPr>
+        <p:txBody>
+          <a:bodyPr wrap="square" rtlCol="0" anchor="ctr"/>
+          <a:lstStyle/>
+          <a:p>
+            <a:pPr indent="0" marL="0">
+              <a:buNone/>
+            </a:pPr>
+            <a:endParaRPr lang="en-US" dirty="0"/>
+          </a:p>
+        </p:txBody>
+      </p:sp>
+      <p:sp>
+        <p:nvSpPr>
+          <p:cNvPr id="3" name="Text 1"/>
+          <p:cNvSpPr/>
+          <p:nvPr/>
+        </p:nvSpPr>
+        <p:spPr>
+          <a:xfrm>
+            <a:off x="406301" y="457051"/>
+            <a:ext cx="8498026" cy="274290"/>
+          </a:xfrm>
+          <a:prstGeom prst="rect">
+            <a:avLst/>
+          </a:prstGeom>
+          <a:noFill/>
+          <a:ln/>
+        </p:spPr>
+        <p:txBody>
+          <a:bodyPr wrap="square" lIns="0" tIns="0" rIns="0" bIns="0" rtlCol="0" anchor="t"/>
+          <a:lstStyle/>
+          <a:p>
+            <a:pPr algn="l" indent="0" marL="0">
+              <a:lnSpc>
+                <a:spcPts val="2160"/>
+              </a:lnSpc>
+              <a:spcBef>
+                <a:spcPts val="600"/>
+              </a:spcBef>
+              <a:spcAft>
+                <a:spcPts val="800"/>
+              </a:spcAft>
+              <a:buNone/>
+            </a:pPr>
+            <a:r>
+              <a:rPr lang="en-US" sz="1800" b="1" dirty="0">
+                <a:solidFill>
+                  <a:srgbClr val="E07A5F"/>
+                </a:solidFill>
+                <a:latin typeface="Georgia" pitchFamily="34" charset="0"/>
+                <a:ea typeface="Georgia" pitchFamily="34" charset="-122"/>
+                <a:cs typeface="Georgia" pitchFamily="34" charset="-120"/>
+              </a:rPr>
+              <a:t>Differentiation</a:t>
+            </a:r>
+            <a:endParaRPr lang="en-US" sz="1800" dirty="0"/>
+          </a:p>
+        </p:txBody>
+      </p:sp>
+      <p:sp>
+        <p:nvSpPr>
+          <p:cNvPr id="4" name="Text 2"/>
+          <p:cNvSpPr/>
+          <p:nvPr/>
+        </p:nvSpPr>
+        <p:spPr>
+          <a:xfrm>
+            <a:off x="634901" y="883593"/>
+            <a:ext cx="8102798" cy="525661"/>
+          </a:xfrm>
+          <a:prstGeom prst="rect">
+            <a:avLst/>
+          </a:prstGeom>
+          <a:noFill/>
+          <a:ln/>
+        </p:spPr>
+        <p:txBody>
+          <a:bodyPr wrap="square" lIns="0" tIns="0" rIns="0" bIns="0" rtlCol="0" anchor="t"/>
+          <a:lstStyle/>
+          <a:p>
+            <a:pPr algn="l" marL="342900" indent="-342900">
+              <a:lnSpc>
+                <a:spcPts val="1620"/>
+              </a:lnSpc>
+              <a:spcAft>
+                <a:spcPts val="300"/>
+              </a:spcAft>
+              <a:buSzPct val="100000"/>
+              <a:buChar char="•"/>
+            </a:pPr>
+            <a:r>
+              <a:rPr lang="en-US" sz="1200" b="1" dirty="0">
+                <a:solidFill>
+                  <a:srgbClr val="2C2C2C"/>
+                </a:solidFill>
+                <a:latin typeface="Verdana" pitchFamily="34" charset="0"/>
+                <a:ea typeface="Verdana" pitchFamily="34" charset="-122"/>
+                <a:cs typeface="Verdana" pitchFamily="34" charset="-120"/>
+              </a:rPr>
+              <a:t>Tier up:</a:t>
+            </a:r>
+            <a:pPr algn="l" indent="0" marL="0">
+              <a:lnSpc>
+                <a:spcPts val="1620"/>
+              </a:lnSpc>
+              <a:spcAft>
+                <a:spcPts val="300"/>
+              </a:spcAft>
+              <a:buNone/>
+            </a:pPr>
+            <a:r>
+              <a:rPr lang="en-US" sz="1200" dirty="0">
+                <a:solidFill>
+                  <a:srgbClr val="2C2C2C"/>
+                </a:solidFill>
+                <a:latin typeface="Verdana" pitchFamily="34" charset="0"/>
+                <a:ea typeface="Verdana" pitchFamily="34" charset="-122"/>
+                <a:cs typeface="Verdana" pitchFamily="34" charset="-120"/>
+              </a:rPr>
+              <a:t> Add 5 more cat-cow rounds OR 5 more bumblebee breaths.</a:t>
+            </a:r>
+            <a:endParaRPr lang="en-US" sz="1200" dirty="0"/>
+          </a:p>
+          <a:p>
+            <a:pPr algn="l" marL="342900" indent="-342900">
+              <a:lnSpc>
+                <a:spcPts val="1620"/>
+              </a:lnSpc>
+              <a:spcAft>
+                <a:spcPts val="300"/>
+              </a:spcAft>
+              <a:buSzPct val="100000"/>
+              <a:buChar char="•"/>
+            </a:pPr>
+            <a:r>
+              <a:rPr lang="en-US" sz="1200" b="1" dirty="0">
+                <a:solidFill>
+                  <a:srgbClr val="2C2C2C"/>
+                </a:solidFill>
+                <a:latin typeface="Verdana" pitchFamily="34" charset="0"/>
+                <a:ea typeface="Verdana" pitchFamily="34" charset="-122"/>
+                <a:cs typeface="Verdana" pitchFamily="34" charset="-120"/>
+              </a:rPr>
+              <a:t>Tier down:</a:t>
+            </a:r>
+            <a:pPr algn="l" indent="0" marL="0">
+              <a:lnSpc>
+                <a:spcPts val="1620"/>
+              </a:lnSpc>
+              <a:spcAft>
+                <a:spcPts val="300"/>
+              </a:spcAft>
+              <a:buNone/>
+            </a:pPr>
+            <a:r>
+              <a:rPr lang="en-US" sz="1200" dirty="0">
+                <a:solidFill>
+                  <a:srgbClr val="2C2C2C"/>
+                </a:solidFill>
+                <a:latin typeface="Verdana" pitchFamily="34" charset="0"/>
+                <a:ea typeface="Verdana" pitchFamily="34" charset="-122"/>
+                <a:cs typeface="Verdana" pitchFamily="34" charset="-120"/>
+              </a:rPr>
+              <a:t> Skip the bumblebee if shy or unwell. Replace with 3 natural breaths in seated.</a:t>
+            </a:r>
+            <a:endParaRPr lang="en-US" sz="1200" dirty="0"/>
+          </a:p>
+        </p:txBody>
+      </p:sp>
+      <p:sp>
+        <p:nvSpPr>
+          <p:cNvPr id="5" name="Text 3"/>
+          <p:cNvSpPr/>
+          <p:nvPr/>
+        </p:nvSpPr>
+        <p:spPr>
+          <a:xfrm>
+            <a:off x="406301" y="4434929"/>
+            <a:ext cx="8498026" cy="213271"/>
+          </a:xfrm>
+          <a:prstGeom prst="rect">
+            <a:avLst/>
+          </a:prstGeom>
+          <a:noFill/>
+          <a:ln/>
+        </p:spPr>
+        <p:txBody>
+          <a:bodyPr wrap="square" lIns="0" tIns="0" rIns="0" bIns="0" rtlCol="0" anchor="t"/>
+          <a:lstStyle/>
+          <a:p>
+            <a:pPr algn="l" indent="0" marL="0">
+              <a:lnSpc>
+                <a:spcPts val="1680"/>
+              </a:lnSpc>
+              <a:spcBef>
+                <a:spcPts val="300"/>
+              </a:spcBef>
+              <a:spcAft>
+                <a:spcPts val="300"/>
+              </a:spcAft>
+              <a:buNone/>
+            </a:pPr>
+            <a:r>
+              <a:rPr lang="en-US" sz="1200" dirty="0">
+                <a:solidFill>
+                  <a:srgbClr val="2C2C2C"/>
+                </a:solidFill>
+                <a:latin typeface="Verdana" pitchFamily="34" charset="0"/>
+                <a:ea typeface="Verdana" pitchFamily="34" charset="-122"/>
+                <a:cs typeface="Verdana" pitchFamily="34" charset="-120"/>
+              </a:rPr>
+              <a:t>Primary ·  · IKS Curriculum</a:t>
+            </a:r>
+            <a:endParaRPr lang="en-US" sz="1200" dirty="0"/>
+          </a:p>
+        </p:txBody>
+      </p:sp>
+    </p:spTree>
+  </p:cSld>
+  <p:clrMapOvr>
+    <a:masterClrMapping/>
+  </p:clrMapOvr>
+</p:sld>
+</file>
+
+<file path=ppt/slides/slide14.xml><?xml version="1.0" encoding="utf-8"?>
+<p:sld xmlns:a="http://schemas.openxmlformats.org/drawingml/2006/main" xmlns:r="http://schemas.openxmlformats.org/officeDocument/2006/relationships" xmlns:p="http://schemas.openxmlformats.org/presentationml/2006/main">
+  <p:cSld name="Slide 14">
+    <p:bg>
+      <p:bgPr>
+        <a:solidFill>
+          <a:srgbClr val="FAF7F2"/>
+        </a:solidFill>
+      </p:bgPr>
+    </p:bg>
+    <p:spTree>
+      <p:nvGrpSpPr>
+        <p:cNvPr id="1" name=""/>
+        <p:cNvGrpSpPr/>
+        <p:nvPr/>
+      </p:nvGrpSpPr>
+      <p:grpSpPr>
+        <a:xfrm>
+          <a:off x="0" y="0"/>
+          <a:ext cx="0" cy="0"/>
+          <a:chOff x="0" y="0"/>
+          <a:chExt cx="0" cy="0"/>
+        </a:xfrm>
+      </p:grpSpPr>
+      <p:sp>
+        <p:nvSpPr>
+          <p:cNvPr id="2" name="Text 0"/>
+          <p:cNvSpPr/>
+          <p:nvPr/>
+        </p:nvSpPr>
+        <p:spPr>
+          <a:xfrm>
+            <a:off x="0" y="0"/>
+            <a:ext cx="9144000" cy="101501"/>
+          </a:xfrm>
+          <a:prstGeom prst="rect">
+            <a:avLst/>
+          </a:prstGeom>
+          <a:solidFill>
+            <a:srgbClr val="87A96B"/>
+          </a:solidFill>
+          <a:ln/>
+        </p:spPr>
+        <p:txBody>
+          <a:bodyPr wrap="square" rtlCol="0" anchor="ctr"/>
+          <a:lstStyle/>
+          <a:p>
+            <a:pPr indent="0" marL="0">
+              <a:buNone/>
+            </a:pPr>
+            <a:endParaRPr lang="en-US" dirty="0"/>
+          </a:p>
+        </p:txBody>
+      </p:sp>
+      <p:sp>
+        <p:nvSpPr>
+          <p:cNvPr id="3" name="Text 1"/>
+          <p:cNvSpPr/>
+          <p:nvPr/>
+        </p:nvSpPr>
+        <p:spPr>
+          <a:xfrm>
+            <a:off x="406301" y="457051"/>
+            <a:ext cx="8498026" cy="274290"/>
+          </a:xfrm>
+          <a:prstGeom prst="rect">
+            <a:avLst/>
+          </a:prstGeom>
+          <a:noFill/>
+          <a:ln/>
+        </p:spPr>
+        <p:txBody>
+          <a:bodyPr wrap="square" lIns="0" tIns="0" rIns="0" bIns="0" rtlCol="0" anchor="t"/>
+          <a:lstStyle/>
+          <a:p>
+            <a:pPr algn="l" indent="0" marL="0">
+              <a:lnSpc>
+                <a:spcPts val="2160"/>
+              </a:lnSpc>
+              <a:spcBef>
+                <a:spcPts val="600"/>
+              </a:spcBef>
+              <a:spcAft>
+                <a:spcPts val="800"/>
+              </a:spcAft>
+              <a:buNone/>
+            </a:pPr>
+            <a:r>
+              <a:rPr lang="en-US" sz="1800" b="1" dirty="0">
+                <a:solidFill>
+                  <a:srgbClr val="E07A5F"/>
+                </a:solidFill>
+                <a:latin typeface="Georgia" pitchFamily="34" charset="0"/>
+                <a:ea typeface="Georgia" pitchFamily="34" charset="-122"/>
+                <a:cs typeface="Georgia" pitchFamily="34" charset="-120"/>
+              </a:rPr>
+              <a:t>Teacher's quick notes</a:t>
+            </a:r>
+            <a:endParaRPr lang="en-US" sz="1800" dirty="0"/>
+          </a:p>
+        </p:txBody>
+      </p:sp>
+      <p:sp>
+        <p:nvSpPr>
+          <p:cNvPr id="4" name="Text 2"/>
+          <p:cNvSpPr/>
+          <p:nvPr/>
+        </p:nvSpPr>
+        <p:spPr>
+          <a:xfrm>
+            <a:off x="634901" y="883593"/>
+            <a:ext cx="8102798" cy="525661"/>
+          </a:xfrm>
+          <a:prstGeom prst="rect">
+            <a:avLst/>
+          </a:prstGeom>
+          <a:noFill/>
+          <a:ln/>
+        </p:spPr>
+        <p:txBody>
+          <a:bodyPr wrap="square" lIns="0" tIns="0" rIns="0" bIns="0" rtlCol="0" anchor="t"/>
+          <a:lstStyle/>
+          <a:p>
+            <a:pPr algn="l" marL="342900" indent="-342900">
+              <a:lnSpc>
+                <a:spcPts val="1620"/>
+              </a:lnSpc>
+              <a:spcAft>
+                <a:spcPts val="300"/>
+              </a:spcAft>
+              <a:buSzPct val="100000"/>
+              <a:buChar char="•"/>
+            </a:pPr>
+            <a:r>
+              <a:rPr lang="en-US" sz="1200" dirty="0">
+                <a:solidFill>
+                  <a:srgbClr val="2C2C2C"/>
+                </a:solidFill>
+                <a:latin typeface="Verdana" pitchFamily="34" charset="0"/>
+                <a:ea typeface="Verdana" pitchFamily="34" charset="-122"/>
+                <a:cs typeface="Verdana" pitchFamily="34" charset="-120"/>
+              </a:rPr>
+              <a:t>This is the practice rehearsal for the project. Children should know the FLOW now.</a:t>
+            </a:r>
+            <a:endParaRPr lang="en-US" sz="1200" dirty="0"/>
+          </a:p>
+          <a:p>
+            <a:pPr algn="l" marL="342900" indent="-342900">
+              <a:lnSpc>
+                <a:spcPts val="1620"/>
+              </a:lnSpc>
+              <a:spcAft>
+                <a:spcPts val="300"/>
+              </a:spcAft>
+              <a:buSzPct val="100000"/>
+              <a:buChar char="•"/>
+            </a:pPr>
+            <a:r>
+              <a:rPr lang="en-US" sz="1200" dirty="0">
+                <a:solidFill>
+                  <a:srgbClr val="2C2C2C"/>
+                </a:solidFill>
+                <a:latin typeface="Verdana" pitchFamily="34" charset="0"/>
+                <a:ea typeface="Verdana" pitchFamily="34" charset="-122"/>
+                <a:cs typeface="Verdana" pitchFamily="34" charset="-120"/>
+              </a:rPr>
+              <a:t>Day 7 they'll INVENT a pose to add — preview it: "tomorrow, you'll make UP a pose and give it a name!"</a:t>
             </a:r>
             <a:endParaRPr lang="en-US" sz="1200" dirty="0"/>
           </a:p>
@@ -2679,7 +3510,7 @@
                 <a:ea typeface="Georgia" pitchFamily="34" charset="-122"/>
                 <a:cs typeface="Georgia" pitchFamily="34" charset="-120"/>
               </a:rPr>
-              <a:t>Materials</a:t>
+              <a:t>Goal</a:t>
             </a:r>
             <a:endParaRPr lang="en-US" sz="1800" dirty="0"/>
           </a:p>
@@ -2727,7 +3558,7 @@
                 <a:ea typeface="Verdana" pitchFamily="34" charset="-122"/>
                 <a:cs typeface="Verdana" pitchFamily="34" charset="-120"/>
               </a:rPr>
-              <a:t>– Mats / open floor</a:t>
+              <a:t>Children flow through all 5 poses + bhrāmarī as a sequence, animal-style.</a:t>
             </a:r>
             <a:endParaRPr lang="en-US" sz="1200" dirty="0"/>
           </a:p>
@@ -2885,7 +3716,7 @@
                 <a:ea typeface="Georgia" pitchFamily="34" charset="-122"/>
                 <a:cs typeface="Georgia" pitchFamily="34" charset="-120"/>
               </a:rPr>
-              <a:t>The flow</a:t>
+              <a:t>Materials</a:t>
             </a:r>
             <a:endParaRPr lang="en-US" sz="1800" dirty="0"/>
           </a:p>
@@ -2894,6 +3725,52 @@
       <p:sp>
         <p:nvSpPr>
           <p:cNvPr id="4" name="Text 2"/>
+          <p:cNvSpPr/>
+          <p:nvPr/>
+        </p:nvSpPr>
+        <p:spPr>
+          <a:xfrm>
+            <a:off x="634901" y="883593"/>
+            <a:ext cx="8102798" cy="281880"/>
+          </a:xfrm>
+          <a:prstGeom prst="rect">
+            <a:avLst/>
+          </a:prstGeom>
+          <a:noFill/>
+          <a:ln/>
+        </p:spPr>
+        <p:txBody>
+          <a:bodyPr wrap="square" lIns="0" tIns="0" rIns="0" bIns="0" rtlCol="0" anchor="t"/>
+          <a:lstStyle/>
+          <a:p>
+            <a:pPr algn="l" marL="342900" indent="-342900">
+              <a:lnSpc>
+                <a:spcPts val="1620"/>
+              </a:lnSpc>
+              <a:spcAft>
+                <a:spcPts val="300"/>
+              </a:spcAft>
+              <a:buSzPct val="100000"/>
+              <a:buChar char="•"/>
+            </a:pPr>
+            <a:r>
+              <a:rPr lang="en-US" sz="1200" dirty="0">
+                <a:solidFill>
+                  <a:srgbClr val="2C2C2C"/>
+                </a:solidFill>
+                <a:latin typeface="Verdana" pitchFamily="34" charset="0"/>
+                <a:ea typeface="Verdana" pitchFamily="34" charset="-122"/>
+                <a:cs typeface="Verdana" pitchFamily="34" charset="-120"/>
+              </a:rPr>
+              <a:t>Mats / open floor</a:t>
+            </a:r>
+            <a:endParaRPr lang="en-US" sz="1200" dirty="0"/>
+          </a:p>
+        </p:txBody>
+      </p:sp>
+      <p:sp>
+        <p:nvSpPr>
+          <p:cNvPr id="5" name="Text 3"/>
           <p:cNvSpPr/>
           <p:nvPr/>
         </p:nvSpPr>
@@ -3043,7 +3920,7 @@
                 <a:ea typeface="Georgia" pitchFamily="34" charset="-122"/>
                 <a:cs typeface="Georgia" pitchFamily="34" charset="-120"/>
               </a:rPr>
-              <a:t>Settle + opening tāḍāsana (3 min)</a:t>
+              <a:t>The flow</a:t>
             </a:r>
             <a:endParaRPr lang="en-US" sz="1800" dirty="0"/>
           </a:p>
@@ -3201,7 +4078,7 @@
                 <a:ea typeface="Georgia" pitchFamily="34" charset="-122"/>
                 <a:cs typeface="Georgia" pitchFamily="34" charset="-120"/>
               </a:rPr>
-              <a:t>Demo the sequence (5 min)</a:t>
+              <a:t>Settle + opening tāḍāsana (3 min)</a:t>
             </a:r>
             <a:endParaRPr lang="en-US" sz="1800" dirty="0"/>
           </a:p>
@@ -3210,76 +4087,6 @@
       <p:sp>
         <p:nvSpPr>
           <p:cNvPr id="4" name="Text 2"/>
-          <p:cNvSpPr/>
-          <p:nvPr/>
-        </p:nvSpPr>
-        <p:spPr>
-          <a:xfrm>
-            <a:off x="634901" y="883593"/>
-            <a:ext cx="8102798" cy="731341"/>
-          </a:xfrm>
-          <a:prstGeom prst="rect">
-            <a:avLst/>
-          </a:prstGeom>
-          <a:noFill/>
-          <a:ln/>
-        </p:spPr>
-        <p:txBody>
-          <a:bodyPr wrap="square" lIns="0" tIns="0" rIns="0" bIns="0" rtlCol="0" anchor="t"/>
-          <a:lstStyle/>
-          <a:p>
-            <a:pPr algn="l" marL="342900" indent="-342900">
-              <a:lnSpc>
-                <a:spcPts val="1620"/>
-              </a:lnSpc>
-              <a:spcAft>
-                <a:spcPts val="300"/>
-              </a:spcAft>
-              <a:buSzPct val="100000"/>
-              <a:buChar char="•"/>
-            </a:pPr>
-            <a:r>
-              <a:rPr lang="en-US" sz="1200" i="1" dirty="0">
-                <a:solidFill>
-                  <a:srgbClr val="2C2C2C"/>
-                </a:solidFill>
-                <a:latin typeface="Verdana" pitchFamily="34" charset="0"/>
-                <a:ea typeface="Verdana" pitchFamily="34" charset="-122"/>
-                <a:cs typeface="Verdana" pitchFamily="34" charset="-120"/>
-              </a:rPr>
-              <a:t>"Today we put EVERYTHING together. The Animal Yoga Walk."</a:t>
-            </a:r>
-            <a:endParaRPr lang="en-US" sz="1200" dirty="0"/>
-          </a:p>
-          <a:p>
-            <a:pPr algn="l" marL="342900" indent="-342900">
-              <a:lnSpc>
-                <a:spcPts val="1620"/>
-              </a:lnSpc>
-              <a:spcAft>
-                <a:spcPts val="300"/>
-              </a:spcAft>
-              <a:buSzPct val="100000"/>
-              <a:buChar char="•"/>
-            </a:pPr>
-            <a:r>
-              <a:rPr lang="en-US" sz="1200" i="1" dirty="0">
-                <a:solidFill>
-                  <a:srgbClr val="2C2C2C"/>
-                </a:solidFill>
-                <a:latin typeface="Verdana" pitchFamily="34" charset="0"/>
-                <a:ea typeface="Verdana" pitchFamily="34" charset="-122"/>
-                <a:cs typeface="Verdana" pitchFamily="34" charset="-120"/>
-              </a:rPr>
-              <a:t>"Mountain → Flamingo (Tree, both sides) → Sleeping Puppy (Child's pose) → Cat-Cow waves → Bumblebee → back to Mountain."</a:t>
-            </a:r>
-            <a:endParaRPr lang="en-US" sz="1200" dirty="0"/>
-          </a:p>
-        </p:txBody>
-      </p:sp>
-      <p:sp>
-        <p:nvSpPr>
-          <p:cNvPr id="5" name="Text 3"/>
           <p:cNvSpPr/>
           <p:nvPr/>
         </p:nvSpPr>
@@ -3429,7 +4236,7 @@
                 <a:ea typeface="Georgia" pitchFamily="34" charset="-122"/>
                 <a:cs typeface="Georgia" pitchFamily="34" charset="-120"/>
               </a:rPr>
-              <a:t>Practice the flow (18 min)</a:t>
+              <a:t>Demo the sequence (5 min)</a:t>
             </a:r>
             <a:endParaRPr lang="en-US" sz="1800" dirty="0"/>
           </a:p>
@@ -3443,8 +4250,8 @@
         </p:nvSpPr>
         <p:spPr>
           <a:xfrm>
-            <a:off x="406301" y="870942"/>
-            <a:ext cx="8498026" cy="213271"/>
+            <a:off x="634901" y="883593"/>
+            <a:ext cx="8102798" cy="731341"/>
           </a:xfrm>
           <a:prstGeom prst="rect">
             <a:avLst/>
@@ -3456,20 +4263,18 @@
           <a:bodyPr wrap="square" lIns="0" tIns="0" rIns="0" bIns="0" rtlCol="0" anchor="t"/>
           <a:lstStyle/>
           <a:p>
-            <a:pPr algn="l" indent="0" marL="0">
+            <a:pPr algn="l" marL="342900" indent="-342900">
               <a:lnSpc>
-                <a:spcPts val="1680"/>
+                <a:spcPts val="1620"/>
               </a:lnSpc>
-              <a:spcBef>
-                <a:spcPts val="300"/>
-              </a:spcBef>
               <a:spcAft>
                 <a:spcPts val="300"/>
               </a:spcAft>
-              <a:buNone/>
-            </a:pPr>
-            <a:r>
-              <a:rPr lang="en-US" sz="1200" dirty="0">
+              <a:buSzPct val="100000"/>
+              <a:buChar char="•"/>
+            </a:pPr>
+            <a:r>
+              <a:rPr lang="en-US" sz="1200" i="1" dirty="0">
                 <a:solidFill>
                   <a:srgbClr val="2C2C2C"/>
                 </a:solidFill>
@@ -3477,394 +4282,23 @@
                 <a:ea typeface="Verdana" pitchFamily="34" charset="-122"/>
                 <a:cs typeface="Verdana" pitchFamily="34" charset="-120"/>
               </a:rPr>
-              <a:t>Round 1: very slow, teacher calling each pose.</a:t>
+              <a:t>"Today we put EVERYTHING together. The Animal Yoga Walk."</a:t>
             </a:r>
             <a:endParaRPr lang="en-US" sz="1200" dirty="0"/>
           </a:p>
-        </p:txBody>
-      </p:sp>
-      <p:sp>
-        <p:nvSpPr>
-          <p:cNvPr id="5" name="Text 3"/>
-          <p:cNvSpPr/>
-          <p:nvPr/>
-        </p:nvSpPr>
-        <p:spPr>
-          <a:xfrm>
-            <a:off x="406301" y="1173063"/>
-            <a:ext cx="8331398" cy="1475929"/>
-          </a:xfrm>
-          <a:prstGeom prst="rect">
-            <a:avLst/>
-          </a:prstGeom>
-          <a:solidFill>
-            <a:srgbClr val="FFFFFF"/>
-          </a:solidFill>
-          <a:ln/>
-        </p:spPr>
-        <p:txBody>
-          <a:bodyPr wrap="square" rtlCol="0" anchor="ctr"/>
-          <a:lstStyle/>
-          <a:p>
-            <a:pPr indent="0" marL="0">
-              <a:buNone/>
-            </a:pPr>
-            <a:endParaRPr lang="en-US" dirty="0"/>
-          </a:p>
-        </p:txBody>
-      </p:sp>
-      <p:sp>
-        <p:nvSpPr>
-          <p:cNvPr id="6" name="Shape 4"/>
-          <p:cNvSpPr/>
-          <p:nvPr/>
-        </p:nvSpPr>
-        <p:spPr>
-          <a:xfrm>
-            <a:off x="430113" y="1173063"/>
-            <a:ext cx="0" cy="1475929"/>
-          </a:xfrm>
-          <a:prstGeom prst="line">
-            <a:avLst/>
-          </a:prstGeom>
-          <a:noFill/>
-          <a:ln w="47625">
-            <a:solidFill>
-              <a:srgbClr val="87A96B"/>
-            </a:solidFill>
-            <a:prstDash val="solid"/>
-          </a:ln>
-        </p:spPr>
-      </p:sp>
-      <p:sp>
-        <p:nvSpPr>
-          <p:cNvPr id="7" name="Text 5"/>
-          <p:cNvSpPr/>
-          <p:nvPr/>
-        </p:nvSpPr>
-        <p:spPr>
-          <a:xfrm>
-            <a:off x="631627" y="1300014"/>
-            <a:ext cx="8086939" cy="174575"/>
-          </a:xfrm>
-          <a:prstGeom prst="rect">
-            <a:avLst/>
-          </a:prstGeom>
-          <a:noFill/>
-          <a:ln/>
-        </p:spPr>
-        <p:txBody>
-          <a:bodyPr wrap="square" lIns="0" tIns="0" rIns="0" bIns="0" rtlCol="0" anchor="t"/>
-          <a:lstStyle/>
-          <a:p>
-            <a:pPr algn="l" indent="0" marL="0">
+          <a:p>
+            <a:pPr algn="l" marL="342900" indent="-342900">
               <a:lnSpc>
-                <a:spcPts val="1375"/>
+                <a:spcPts val="1620"/>
               </a:lnSpc>
-              <a:buNone/>
-            </a:pPr>
-            <a:r>
-              <a:rPr lang="en-US" sz="1100" dirty="0">
-                <a:solidFill>
-                  <a:srgbClr val="2C2C2C"/>
-                </a:solidFill>
-                <a:latin typeface="Courier New" pitchFamily="34" charset="0"/>
-                <a:ea typeface="Courier New" pitchFamily="34" charset="-122"/>
-                <a:cs typeface="Courier New" pitchFamily="34" charset="-120"/>
-              </a:rPr>
-              <a:t>Mountain — 20 sec</a:t>
-            </a:r>
-            <a:endParaRPr lang="en-US" sz="1100" dirty="0"/>
-          </a:p>
-        </p:txBody>
-      </p:sp>
-      <p:sp>
-        <p:nvSpPr>
-          <p:cNvPr id="8" name="Text 6"/>
-          <p:cNvSpPr/>
-          <p:nvPr/>
-        </p:nvSpPr>
-        <p:spPr>
-          <a:xfrm>
-            <a:off x="631627" y="1474589"/>
-            <a:ext cx="8086939" cy="174575"/>
-          </a:xfrm>
-          <a:prstGeom prst="rect">
-            <a:avLst/>
-          </a:prstGeom>
-          <a:noFill/>
-          <a:ln/>
-        </p:spPr>
-        <p:txBody>
-          <a:bodyPr wrap="square" lIns="0" tIns="0" rIns="0" bIns="0" rtlCol="0" anchor="t"/>
-          <a:lstStyle/>
-          <a:p>
-            <a:pPr algn="l" indent="0" marL="0">
-              <a:lnSpc>
-                <a:spcPts val="1375"/>
-              </a:lnSpc>
-              <a:buNone/>
-            </a:pPr>
-            <a:r>
-              <a:rPr lang="en-US" sz="1100" dirty="0">
-                <a:solidFill>
-                  <a:srgbClr val="2C2C2C"/>
-                </a:solidFill>
-                <a:latin typeface="Courier New" pitchFamily="34" charset="0"/>
-                <a:ea typeface="Courier New" pitchFamily="34" charset="-122"/>
-                <a:cs typeface="Courier New" pitchFamily="34" charset="-120"/>
-              </a:rPr>
-              <a:t>Flamingo (tree pose, right) — 15 sec</a:t>
-            </a:r>
-            <a:endParaRPr lang="en-US" sz="1100" dirty="0"/>
-          </a:p>
-        </p:txBody>
-      </p:sp>
-      <p:sp>
-        <p:nvSpPr>
-          <p:cNvPr id="9" name="Text 7"/>
-          <p:cNvSpPr/>
-          <p:nvPr/>
-        </p:nvSpPr>
-        <p:spPr>
-          <a:xfrm>
-            <a:off x="631627" y="1649164"/>
-            <a:ext cx="8086939" cy="174575"/>
-          </a:xfrm>
-          <a:prstGeom prst="rect">
-            <a:avLst/>
-          </a:prstGeom>
-          <a:noFill/>
-          <a:ln/>
-        </p:spPr>
-        <p:txBody>
-          <a:bodyPr wrap="square" lIns="0" tIns="0" rIns="0" bIns="0" rtlCol="0" anchor="t"/>
-          <a:lstStyle/>
-          <a:p>
-            <a:pPr algn="l" indent="0" marL="0">
-              <a:lnSpc>
-                <a:spcPts val="1375"/>
-              </a:lnSpc>
-              <a:buNone/>
-            </a:pPr>
-            <a:r>
-              <a:rPr lang="en-US" sz="1100" dirty="0">
-                <a:solidFill>
-                  <a:srgbClr val="2C2C2C"/>
-                </a:solidFill>
-                <a:latin typeface="Courier New" pitchFamily="34" charset="0"/>
-                <a:ea typeface="Courier New" pitchFamily="34" charset="-122"/>
-                <a:cs typeface="Courier New" pitchFamily="34" charset="-120"/>
-              </a:rPr>
-              <a:t>Flamingo (tree pose, left) — 15 sec</a:t>
-            </a:r>
-            <a:endParaRPr lang="en-US" sz="1100" dirty="0"/>
-          </a:p>
-        </p:txBody>
-      </p:sp>
-      <p:sp>
-        <p:nvSpPr>
-          <p:cNvPr id="10" name="Text 8"/>
-          <p:cNvSpPr/>
-          <p:nvPr/>
-        </p:nvSpPr>
-        <p:spPr>
-          <a:xfrm>
-            <a:off x="631627" y="1823740"/>
-            <a:ext cx="8086939" cy="174575"/>
-          </a:xfrm>
-          <a:prstGeom prst="rect">
-            <a:avLst/>
-          </a:prstGeom>
-          <a:noFill/>
-          <a:ln/>
-        </p:spPr>
-        <p:txBody>
-          <a:bodyPr wrap="square" lIns="0" tIns="0" rIns="0" bIns="0" rtlCol="0" anchor="t"/>
-          <a:lstStyle/>
-          <a:p>
-            <a:pPr algn="l" indent="0" marL="0">
-              <a:lnSpc>
-                <a:spcPts val="1375"/>
-              </a:lnSpc>
-              <a:buNone/>
-            </a:pPr>
-            <a:r>
-              <a:rPr lang="en-US" sz="1100" dirty="0">
-                <a:solidFill>
-                  <a:srgbClr val="2C2C2C"/>
-                </a:solidFill>
-                <a:latin typeface="Courier New" pitchFamily="34" charset="0"/>
-                <a:ea typeface="Courier New" pitchFamily="34" charset="-122"/>
-                <a:cs typeface="Courier New" pitchFamily="34" charset="-120"/>
-              </a:rPr>
-              <a:t>Sleeping Puppy (child's pose) — 60 sec</a:t>
-            </a:r>
-            <a:endParaRPr lang="en-US" sz="1100" dirty="0"/>
-          </a:p>
-        </p:txBody>
-      </p:sp>
-      <p:sp>
-        <p:nvSpPr>
-          <p:cNvPr id="11" name="Text 9"/>
-          <p:cNvSpPr/>
-          <p:nvPr/>
-        </p:nvSpPr>
-        <p:spPr>
-          <a:xfrm>
-            <a:off x="631627" y="1998315"/>
-            <a:ext cx="8086939" cy="174575"/>
-          </a:xfrm>
-          <a:prstGeom prst="rect">
-            <a:avLst/>
-          </a:prstGeom>
-          <a:noFill/>
-          <a:ln/>
-        </p:spPr>
-        <p:txBody>
-          <a:bodyPr wrap="square" lIns="0" tIns="0" rIns="0" bIns="0" rtlCol="0" anchor="t"/>
-          <a:lstStyle/>
-          <a:p>
-            <a:pPr algn="l" indent="0" marL="0">
-              <a:lnSpc>
-                <a:spcPts val="1375"/>
-              </a:lnSpc>
-              <a:buNone/>
-            </a:pPr>
-            <a:r>
-              <a:rPr lang="en-US" sz="1100" dirty="0">
-                <a:solidFill>
-                  <a:srgbClr val="2C2C2C"/>
-                </a:solidFill>
-                <a:latin typeface="Courier New" pitchFamily="34" charset="0"/>
-                <a:ea typeface="Courier New" pitchFamily="34" charset="-122"/>
-                <a:cs typeface="Courier New" pitchFamily="34" charset="-120"/>
-              </a:rPr>
-              <a:t>Cat-Cow — 5 waves</a:t>
-            </a:r>
-            <a:endParaRPr lang="en-US" sz="1100" dirty="0"/>
-          </a:p>
-        </p:txBody>
-      </p:sp>
-      <p:sp>
-        <p:nvSpPr>
-          <p:cNvPr id="12" name="Text 10"/>
-          <p:cNvSpPr/>
-          <p:nvPr/>
-        </p:nvSpPr>
-        <p:spPr>
-          <a:xfrm>
-            <a:off x="631627" y="2172891"/>
-            <a:ext cx="8086939" cy="174575"/>
-          </a:xfrm>
-          <a:prstGeom prst="rect">
-            <a:avLst/>
-          </a:prstGeom>
-          <a:noFill/>
-          <a:ln/>
-        </p:spPr>
-        <p:txBody>
-          <a:bodyPr wrap="square" lIns="0" tIns="0" rIns="0" bIns="0" rtlCol="0" anchor="t"/>
-          <a:lstStyle/>
-          <a:p>
-            <a:pPr algn="l" indent="0" marL="0">
-              <a:lnSpc>
-                <a:spcPts val="1375"/>
-              </a:lnSpc>
-              <a:buNone/>
-            </a:pPr>
-            <a:r>
-              <a:rPr lang="en-US" sz="1100" dirty="0">
-                <a:solidFill>
-                  <a:srgbClr val="2C2C2C"/>
-                </a:solidFill>
-                <a:latin typeface="Courier New" pitchFamily="34" charset="0"/>
-                <a:ea typeface="Courier New" pitchFamily="34" charset="-122"/>
-                <a:cs typeface="Courier New" pitchFamily="34" charset="-120"/>
-              </a:rPr>
-              <a:t>Bumblebee Breath — 3 rounds</a:t>
-            </a:r>
-            <a:endParaRPr lang="en-US" sz="1100" dirty="0"/>
-          </a:p>
-        </p:txBody>
-      </p:sp>
-      <p:sp>
-        <p:nvSpPr>
-          <p:cNvPr id="13" name="Text 11"/>
-          <p:cNvSpPr/>
-          <p:nvPr/>
-        </p:nvSpPr>
-        <p:spPr>
-          <a:xfrm>
-            <a:off x="631627" y="2347466"/>
-            <a:ext cx="8086939" cy="174575"/>
-          </a:xfrm>
-          <a:prstGeom prst="rect">
-            <a:avLst/>
-          </a:prstGeom>
-          <a:noFill/>
-          <a:ln/>
-        </p:spPr>
-        <p:txBody>
-          <a:bodyPr wrap="square" lIns="0" tIns="0" rIns="0" bIns="0" rtlCol="0" anchor="t"/>
-          <a:lstStyle/>
-          <a:p>
-            <a:pPr algn="l" indent="0" marL="0">
-              <a:lnSpc>
-                <a:spcPts val="1375"/>
-              </a:lnSpc>
-              <a:buNone/>
-            </a:pPr>
-            <a:r>
-              <a:rPr lang="en-US" sz="1100" dirty="0">
-                <a:solidFill>
-                  <a:srgbClr val="2C2C2C"/>
-                </a:solidFill>
-                <a:latin typeface="Courier New" pitchFamily="34" charset="0"/>
-                <a:ea typeface="Courier New" pitchFamily="34" charset="-122"/>
-                <a:cs typeface="Courier New" pitchFamily="34" charset="-120"/>
-              </a:rPr>
-              <a:t>Mountain — 20 sec</a:t>
-            </a:r>
-            <a:endParaRPr lang="en-US" sz="1100" dirty="0"/>
-          </a:p>
-        </p:txBody>
-      </p:sp>
-      <p:sp>
-        <p:nvSpPr>
-          <p:cNvPr id="14" name="Text 12"/>
-          <p:cNvSpPr/>
-          <p:nvPr/>
-        </p:nvSpPr>
-        <p:spPr>
-          <a:xfrm>
-            <a:off x="406301" y="2737842"/>
-            <a:ext cx="8498026" cy="213271"/>
-          </a:xfrm>
-          <a:prstGeom prst="rect">
-            <a:avLst/>
-          </a:prstGeom>
-          <a:noFill/>
-          <a:ln/>
-        </p:spPr>
-        <p:txBody>
-          <a:bodyPr wrap="square" lIns="0" tIns="0" rIns="0" bIns="0" rtlCol="0" anchor="t"/>
-          <a:lstStyle/>
-          <a:p>
-            <a:pPr algn="l" indent="0" marL="0">
-              <a:lnSpc>
-                <a:spcPts val="1680"/>
-              </a:lnSpc>
-              <a:spcBef>
-                <a:spcPts val="300"/>
-              </a:spcBef>
               <a:spcAft>
                 <a:spcPts val="300"/>
               </a:spcAft>
-              <a:buNone/>
-            </a:pPr>
-            <a:r>
-              <a:rPr lang="en-US" sz="1200" dirty="0">
+              <a:buSzPct val="100000"/>
+              <a:buChar char="•"/>
+            </a:pPr>
+            <a:r>
+              <a:rPr lang="en-US" sz="1200" i="1" dirty="0">
                 <a:solidFill>
                   <a:srgbClr val="2C2C2C"/>
                 </a:solidFill>
@@ -3872,7 +4306,7 @@
                 <a:ea typeface="Verdana" pitchFamily="34" charset="-122"/>
                 <a:cs typeface="Verdana" pitchFamily="34" charset="-120"/>
               </a:rPr>
-              <a:t>Total: about 4 min per round.</a:t>
+              <a:t>"Mountain → Flamingo (Tree, both sides) → Sleeping Puppy (Child's pose) → Cat-Cow waves → Bumblebee → back to Mountain."</a:t>
             </a:r>
             <a:endParaRPr lang="en-US" sz="1200" dirty="0"/>
           </a:p>
@@ -3880,103 +4314,7 @@
       </p:sp>
       <p:sp>
         <p:nvSpPr>
-          <p:cNvPr id="15" name="Text 13"/>
-          <p:cNvSpPr/>
-          <p:nvPr/>
-        </p:nvSpPr>
-        <p:spPr>
-          <a:xfrm>
-            <a:off x="406301" y="3027313"/>
-            <a:ext cx="8498026" cy="213271"/>
-          </a:xfrm>
-          <a:prstGeom prst="rect">
-            <a:avLst/>
-          </a:prstGeom>
-          <a:noFill/>
-          <a:ln/>
-        </p:spPr>
-        <p:txBody>
-          <a:bodyPr wrap="square" lIns="0" tIns="0" rIns="0" bIns="0" rtlCol="0" anchor="t"/>
-          <a:lstStyle/>
-          <a:p>
-            <a:pPr algn="l" indent="0" marL="0">
-              <a:lnSpc>
-                <a:spcPts val="1680"/>
-              </a:lnSpc>
-              <a:spcBef>
-                <a:spcPts val="300"/>
-              </a:spcBef>
-              <a:spcAft>
-                <a:spcPts val="300"/>
-              </a:spcAft>
-              <a:buNone/>
-            </a:pPr>
-            <a:r>
-              <a:rPr lang="en-US" sz="1200" dirty="0">
-                <a:solidFill>
-                  <a:srgbClr val="2C2C2C"/>
-                </a:solidFill>
-                <a:latin typeface="Verdana" pitchFamily="34" charset="0"/>
-                <a:ea typeface="Verdana" pitchFamily="34" charset="-122"/>
-                <a:cs typeface="Verdana" pitchFamily="34" charset="-120"/>
-              </a:rPr>
-              <a:t>Round 2: slightly faster, children leading themselves.</a:t>
-            </a:r>
-            <a:endParaRPr lang="en-US" sz="1200" dirty="0"/>
-          </a:p>
-        </p:txBody>
-      </p:sp>
-      <p:sp>
-        <p:nvSpPr>
-          <p:cNvPr id="16" name="Text 14"/>
-          <p:cNvSpPr/>
-          <p:nvPr/>
-        </p:nvSpPr>
-        <p:spPr>
-          <a:xfrm>
-            <a:off x="406301" y="3316784"/>
-            <a:ext cx="8498026" cy="213271"/>
-          </a:xfrm>
-          <a:prstGeom prst="rect">
-            <a:avLst/>
-          </a:prstGeom>
-          <a:noFill/>
-          <a:ln/>
-        </p:spPr>
-        <p:txBody>
-          <a:bodyPr wrap="square" lIns="0" tIns="0" rIns="0" bIns="0" rtlCol="0" anchor="t"/>
-          <a:lstStyle/>
-          <a:p>
-            <a:pPr algn="l" indent="0" marL="0">
-              <a:lnSpc>
-                <a:spcPts val="1680"/>
-              </a:lnSpc>
-              <a:spcBef>
-                <a:spcPts val="300"/>
-              </a:spcBef>
-              <a:spcAft>
-                <a:spcPts val="300"/>
-              </a:spcAft>
-              <a:buNone/>
-            </a:pPr>
-            <a:r>
-              <a:rPr lang="en-US" sz="1200" dirty="0">
-                <a:solidFill>
-                  <a:srgbClr val="2C2C2C"/>
-                </a:solidFill>
-                <a:latin typeface="Verdana" pitchFamily="34" charset="0"/>
-                <a:ea typeface="Verdana" pitchFamily="34" charset="-122"/>
-                <a:cs typeface="Verdana" pitchFamily="34" charset="-120"/>
-              </a:rPr>
-              <a:t>Optional Round 3: a brave child volunteers to call out the sequence.</a:t>
-            </a:r>
-            <a:endParaRPr lang="en-US" sz="1200" dirty="0"/>
-          </a:p>
-        </p:txBody>
-      </p:sp>
-      <p:sp>
-        <p:nvSpPr>
-          <p:cNvPr id="17" name="Text 15"/>
+          <p:cNvPr id="5" name="Text 3"/>
           <p:cNvSpPr/>
           <p:nvPr/>
         </p:nvSpPr>
@@ -4126,7 +4464,7 @@
                 <a:ea typeface="Georgia" pitchFamily="34" charset="-122"/>
                 <a:cs typeface="Georgia" pitchFamily="34" charset="-120"/>
               </a:rPr>
-              <a:t>Reflection (3 min)</a:t>
+              <a:t>Practice the flow (18 min)</a:t>
             </a:r>
             <a:endParaRPr lang="en-US" sz="1800" dirty="0"/>
           </a:p>
@@ -4140,8 +4478,8 @@
         </p:nvSpPr>
         <p:spPr>
           <a:xfrm>
-            <a:off x="634901" y="883593"/>
-            <a:ext cx="8102798" cy="525661"/>
+            <a:off x="406301" y="870942"/>
+            <a:ext cx="8498026" cy="213271"/>
           </a:xfrm>
           <a:prstGeom prst="rect">
             <a:avLst/>
@@ -4153,18 +4491,20 @@
           <a:bodyPr wrap="square" lIns="0" tIns="0" rIns="0" bIns="0" rtlCol="0" anchor="t"/>
           <a:lstStyle/>
           <a:p>
-            <a:pPr algn="l" marL="342900" indent="-342900">
+            <a:pPr algn="l" indent="0" marL="0">
               <a:lnSpc>
-                <a:spcPts val="1620"/>
+                <a:spcPts val="1680"/>
               </a:lnSpc>
+              <a:spcBef>
+                <a:spcPts val="300"/>
+              </a:spcBef>
               <a:spcAft>
                 <a:spcPts val="300"/>
               </a:spcAft>
-              <a:buSzPct val="100000"/>
-              <a:buChar char="•"/>
-            </a:pPr>
-            <a:r>
-              <a:rPr lang="en-US" sz="1200" i="1" dirty="0">
+              <a:buNone/>
+            </a:pPr>
+            <a:r>
+              <a:rPr lang="en-US" sz="1200" dirty="0">
                 <a:solidFill>
                   <a:srgbClr val="2C2C2C"/>
                 </a:solidFill>
@@ -4172,31 +4512,7 @@
                 <a:ea typeface="Verdana" pitchFamily="34" charset="-122"/>
                 <a:cs typeface="Verdana" pitchFamily="34" charset="-120"/>
               </a:rPr>
-              <a:t>"Which animal felt best in your body?"</a:t>
-            </a:r>
-            <a:endParaRPr lang="en-US" sz="1200" dirty="0"/>
-          </a:p>
-          <a:p>
-            <a:pPr algn="l" marL="342900" indent="-342900">
-              <a:lnSpc>
-                <a:spcPts val="1620"/>
-              </a:lnSpc>
-              <a:spcAft>
-                <a:spcPts val="300"/>
-              </a:spcAft>
-              <a:buSzPct val="100000"/>
-              <a:buChar char="•"/>
-            </a:pPr>
-            <a:r>
-              <a:rPr lang="en-US" sz="1200" i="1" dirty="0">
-                <a:solidFill>
-                  <a:srgbClr val="2C2C2C"/>
-                </a:solidFill>
-                <a:latin typeface="Verdana" pitchFamily="34" charset="0"/>
-                <a:ea typeface="Verdana" pitchFamily="34" charset="-122"/>
-                <a:cs typeface="Verdana" pitchFamily="34" charset="-120"/>
-              </a:rPr>
-              <a:t>"Which one was hardest?"</a:t>
+              <a:t>Round 1: very slow, teacher calling each pose.</a:t>
             </a:r>
             <a:endParaRPr lang="en-US" sz="1200" dirty="0"/>
           </a:p>
@@ -4354,7 +4670,7 @@
                 <a:ea typeface="Georgia" pitchFamily="34" charset="-122"/>
                 <a:cs typeface="Georgia" pitchFamily="34" charset="-120"/>
               </a:rPr>
-              <a:t>Close (1 min)</a:t>
+              <a:t>Practice the flow (18 min) (cont.)</a:t>
             </a:r>
             <a:endParaRPr lang="en-US" sz="1800" dirty="0"/>
           </a:p>
@@ -4368,8 +4684,61 @@
         </p:nvSpPr>
         <p:spPr>
           <a:xfrm>
-            <a:off x="406301" y="870942"/>
-            <a:ext cx="8498026" cy="213271"/>
+            <a:off x="406301" y="883593"/>
+            <a:ext cx="8331398" cy="1475929"/>
+          </a:xfrm>
+          <a:prstGeom prst="rect">
+            <a:avLst/>
+          </a:prstGeom>
+          <a:solidFill>
+            <a:srgbClr val="FFFFFF"/>
+          </a:solidFill>
+          <a:ln/>
+        </p:spPr>
+        <p:txBody>
+          <a:bodyPr wrap="square" rtlCol="0" anchor="ctr"/>
+          <a:lstStyle/>
+          <a:p>
+            <a:pPr indent="0" marL="0">
+              <a:buNone/>
+            </a:pPr>
+            <a:endParaRPr lang="en-US" dirty="0"/>
+          </a:p>
+        </p:txBody>
+      </p:sp>
+      <p:sp>
+        <p:nvSpPr>
+          <p:cNvPr id="5" name="Shape 3"/>
+          <p:cNvSpPr/>
+          <p:nvPr/>
+        </p:nvSpPr>
+        <p:spPr>
+          <a:xfrm>
+            <a:off x="430113" y="883593"/>
+            <a:ext cx="0" cy="1475929"/>
+          </a:xfrm>
+          <a:prstGeom prst="line">
+            <a:avLst/>
+          </a:prstGeom>
+          <a:noFill/>
+          <a:ln w="47625">
+            <a:solidFill>
+              <a:srgbClr val="87A96B"/>
+            </a:solidFill>
+            <a:prstDash val="solid"/>
+          </a:ln>
+        </p:spPr>
+      </p:sp>
+      <p:sp>
+        <p:nvSpPr>
+          <p:cNvPr id="6" name="Text 4"/>
+          <p:cNvSpPr/>
+          <p:nvPr/>
+        </p:nvSpPr>
+        <p:spPr>
+          <a:xfrm>
+            <a:off x="631627" y="1010543"/>
+            <a:ext cx="8086939" cy="174575"/>
           </a:xfrm>
           <a:prstGeom prst="rect">
             <a:avLst/>
@@ -4383,34 +4752,280 @@
           <a:p>
             <a:pPr algn="l" indent="0" marL="0">
               <a:lnSpc>
-                <a:spcPts val="1680"/>
+                <a:spcPts val="1375"/>
               </a:lnSpc>
-              <a:spcBef>
-                <a:spcPts val="300"/>
-              </a:spcBef>
-              <a:spcAft>
-                <a:spcPts val="300"/>
-              </a:spcAft>
-              <a:buNone/>
-            </a:pPr>
-            <a:r>
-              <a:rPr lang="en-US" sz="1200" dirty="0">
+              <a:buNone/>
+            </a:pPr>
+            <a:r>
+              <a:rPr lang="en-US" sz="1100" dirty="0">
                 <a:solidFill>
                   <a:srgbClr val="2C2C2C"/>
                 </a:solidFill>
-                <a:latin typeface="Verdana" pitchFamily="34" charset="0"/>
-                <a:ea typeface="Verdana" pitchFamily="34" charset="-122"/>
-                <a:cs typeface="Verdana" pitchFamily="34" charset="-120"/>
+                <a:latin typeface="Courier New" pitchFamily="34" charset="0"/>
+                <a:ea typeface="Courier New" pitchFamily="34" charset="-122"/>
+                <a:cs typeface="Courier New" pitchFamily="34" charset="-120"/>
               </a:rPr>
-              <a:t>Tāḍāsana. Namaste.</a:t>
-            </a:r>
-            <a:endParaRPr lang="en-US" sz="1200" dirty="0"/>
-          </a:p>
-        </p:txBody>
-      </p:sp>
-      <p:sp>
-        <p:nvSpPr>
-          <p:cNvPr id="5" name="Text 3"/>
+              <a:t>Mountain — 20 sec</a:t>
+            </a:r>
+            <a:endParaRPr lang="en-US" sz="1100" dirty="0"/>
+          </a:p>
+        </p:txBody>
+      </p:sp>
+      <p:sp>
+        <p:nvSpPr>
+          <p:cNvPr id="7" name="Text 5"/>
+          <p:cNvSpPr/>
+          <p:nvPr/>
+        </p:nvSpPr>
+        <p:spPr>
+          <a:xfrm>
+            <a:off x="631627" y="1185118"/>
+            <a:ext cx="8086939" cy="174575"/>
+          </a:xfrm>
+          <a:prstGeom prst="rect">
+            <a:avLst/>
+          </a:prstGeom>
+          <a:noFill/>
+          <a:ln/>
+        </p:spPr>
+        <p:txBody>
+          <a:bodyPr wrap="square" lIns="0" tIns="0" rIns="0" bIns="0" rtlCol="0" anchor="t"/>
+          <a:lstStyle/>
+          <a:p>
+            <a:pPr algn="l" indent="0" marL="0">
+              <a:lnSpc>
+                <a:spcPts val="1375"/>
+              </a:lnSpc>
+              <a:buNone/>
+            </a:pPr>
+            <a:r>
+              <a:rPr lang="en-US" sz="1100" dirty="0">
+                <a:solidFill>
+                  <a:srgbClr val="2C2C2C"/>
+                </a:solidFill>
+                <a:latin typeface="Courier New" pitchFamily="34" charset="0"/>
+                <a:ea typeface="Courier New" pitchFamily="34" charset="-122"/>
+                <a:cs typeface="Courier New" pitchFamily="34" charset="-120"/>
+              </a:rPr>
+              <a:t>Flamingo (tree pose, right) — 15 sec</a:t>
+            </a:r>
+            <a:endParaRPr lang="en-US" sz="1100" dirty="0"/>
+          </a:p>
+        </p:txBody>
+      </p:sp>
+      <p:sp>
+        <p:nvSpPr>
+          <p:cNvPr id="8" name="Text 6"/>
+          <p:cNvSpPr/>
+          <p:nvPr/>
+        </p:nvSpPr>
+        <p:spPr>
+          <a:xfrm>
+            <a:off x="631627" y="1359694"/>
+            <a:ext cx="8086939" cy="174575"/>
+          </a:xfrm>
+          <a:prstGeom prst="rect">
+            <a:avLst/>
+          </a:prstGeom>
+          <a:noFill/>
+          <a:ln/>
+        </p:spPr>
+        <p:txBody>
+          <a:bodyPr wrap="square" lIns="0" tIns="0" rIns="0" bIns="0" rtlCol="0" anchor="t"/>
+          <a:lstStyle/>
+          <a:p>
+            <a:pPr algn="l" indent="0" marL="0">
+              <a:lnSpc>
+                <a:spcPts val="1375"/>
+              </a:lnSpc>
+              <a:buNone/>
+            </a:pPr>
+            <a:r>
+              <a:rPr lang="en-US" sz="1100" dirty="0">
+                <a:solidFill>
+                  <a:srgbClr val="2C2C2C"/>
+                </a:solidFill>
+                <a:latin typeface="Courier New" pitchFamily="34" charset="0"/>
+                <a:ea typeface="Courier New" pitchFamily="34" charset="-122"/>
+                <a:cs typeface="Courier New" pitchFamily="34" charset="-120"/>
+              </a:rPr>
+              <a:t>Flamingo (tree pose, left) — 15 sec</a:t>
+            </a:r>
+            <a:endParaRPr lang="en-US" sz="1100" dirty="0"/>
+          </a:p>
+        </p:txBody>
+      </p:sp>
+      <p:sp>
+        <p:nvSpPr>
+          <p:cNvPr id="9" name="Text 7"/>
+          <p:cNvSpPr/>
+          <p:nvPr/>
+        </p:nvSpPr>
+        <p:spPr>
+          <a:xfrm>
+            <a:off x="631627" y="1534269"/>
+            <a:ext cx="8086939" cy="174575"/>
+          </a:xfrm>
+          <a:prstGeom prst="rect">
+            <a:avLst/>
+          </a:prstGeom>
+          <a:noFill/>
+          <a:ln/>
+        </p:spPr>
+        <p:txBody>
+          <a:bodyPr wrap="square" lIns="0" tIns="0" rIns="0" bIns="0" rtlCol="0" anchor="t"/>
+          <a:lstStyle/>
+          <a:p>
+            <a:pPr algn="l" indent="0" marL="0">
+              <a:lnSpc>
+                <a:spcPts val="1375"/>
+              </a:lnSpc>
+              <a:buNone/>
+            </a:pPr>
+            <a:r>
+              <a:rPr lang="en-US" sz="1100" dirty="0">
+                <a:solidFill>
+                  <a:srgbClr val="2C2C2C"/>
+                </a:solidFill>
+                <a:latin typeface="Courier New" pitchFamily="34" charset="0"/>
+                <a:ea typeface="Courier New" pitchFamily="34" charset="-122"/>
+                <a:cs typeface="Courier New" pitchFamily="34" charset="-120"/>
+              </a:rPr>
+              <a:t>Sleeping Puppy (child's pose) — 60 sec</a:t>
+            </a:r>
+            <a:endParaRPr lang="en-US" sz="1100" dirty="0"/>
+          </a:p>
+        </p:txBody>
+      </p:sp>
+      <p:sp>
+        <p:nvSpPr>
+          <p:cNvPr id="10" name="Text 8"/>
+          <p:cNvSpPr/>
+          <p:nvPr/>
+        </p:nvSpPr>
+        <p:spPr>
+          <a:xfrm>
+            <a:off x="631627" y="1708845"/>
+            <a:ext cx="8086939" cy="174575"/>
+          </a:xfrm>
+          <a:prstGeom prst="rect">
+            <a:avLst/>
+          </a:prstGeom>
+          <a:noFill/>
+          <a:ln/>
+        </p:spPr>
+        <p:txBody>
+          <a:bodyPr wrap="square" lIns="0" tIns="0" rIns="0" bIns="0" rtlCol="0" anchor="t"/>
+          <a:lstStyle/>
+          <a:p>
+            <a:pPr algn="l" indent="0" marL="0">
+              <a:lnSpc>
+                <a:spcPts val="1375"/>
+              </a:lnSpc>
+              <a:buNone/>
+            </a:pPr>
+            <a:r>
+              <a:rPr lang="en-US" sz="1100" dirty="0">
+                <a:solidFill>
+                  <a:srgbClr val="2C2C2C"/>
+                </a:solidFill>
+                <a:latin typeface="Courier New" pitchFamily="34" charset="0"/>
+                <a:ea typeface="Courier New" pitchFamily="34" charset="-122"/>
+                <a:cs typeface="Courier New" pitchFamily="34" charset="-120"/>
+              </a:rPr>
+              <a:t>Cat-Cow — 5 waves</a:t>
+            </a:r>
+            <a:endParaRPr lang="en-US" sz="1100" dirty="0"/>
+          </a:p>
+        </p:txBody>
+      </p:sp>
+      <p:sp>
+        <p:nvSpPr>
+          <p:cNvPr id="11" name="Text 9"/>
+          <p:cNvSpPr/>
+          <p:nvPr/>
+        </p:nvSpPr>
+        <p:spPr>
+          <a:xfrm>
+            <a:off x="631627" y="1883420"/>
+            <a:ext cx="8086939" cy="174575"/>
+          </a:xfrm>
+          <a:prstGeom prst="rect">
+            <a:avLst/>
+          </a:prstGeom>
+          <a:noFill/>
+          <a:ln/>
+        </p:spPr>
+        <p:txBody>
+          <a:bodyPr wrap="square" lIns="0" tIns="0" rIns="0" bIns="0" rtlCol="0" anchor="t"/>
+          <a:lstStyle/>
+          <a:p>
+            <a:pPr algn="l" indent="0" marL="0">
+              <a:lnSpc>
+                <a:spcPts val="1375"/>
+              </a:lnSpc>
+              <a:buNone/>
+            </a:pPr>
+            <a:r>
+              <a:rPr lang="en-US" sz="1100" dirty="0">
+                <a:solidFill>
+                  <a:srgbClr val="2C2C2C"/>
+                </a:solidFill>
+                <a:latin typeface="Courier New" pitchFamily="34" charset="0"/>
+                <a:ea typeface="Courier New" pitchFamily="34" charset="-122"/>
+                <a:cs typeface="Courier New" pitchFamily="34" charset="-120"/>
+              </a:rPr>
+              <a:t>Bumblebee Breath — 3 rounds</a:t>
+            </a:r>
+            <a:endParaRPr lang="en-US" sz="1100" dirty="0"/>
+          </a:p>
+        </p:txBody>
+      </p:sp>
+      <p:sp>
+        <p:nvSpPr>
+          <p:cNvPr id="12" name="Text 10"/>
+          <p:cNvSpPr/>
+          <p:nvPr/>
+        </p:nvSpPr>
+        <p:spPr>
+          <a:xfrm>
+            <a:off x="631627" y="2057995"/>
+            <a:ext cx="8086939" cy="174575"/>
+          </a:xfrm>
+          <a:prstGeom prst="rect">
+            <a:avLst/>
+          </a:prstGeom>
+          <a:noFill/>
+          <a:ln/>
+        </p:spPr>
+        <p:txBody>
+          <a:bodyPr wrap="square" lIns="0" tIns="0" rIns="0" bIns="0" rtlCol="0" anchor="t"/>
+          <a:lstStyle/>
+          <a:p>
+            <a:pPr algn="l" indent="0" marL="0">
+              <a:lnSpc>
+                <a:spcPts val="1375"/>
+              </a:lnSpc>
+              <a:buNone/>
+            </a:pPr>
+            <a:r>
+              <a:rPr lang="en-US" sz="1100" dirty="0">
+                <a:solidFill>
+                  <a:srgbClr val="2C2C2C"/>
+                </a:solidFill>
+                <a:latin typeface="Courier New" pitchFamily="34" charset="0"/>
+                <a:ea typeface="Courier New" pitchFamily="34" charset="-122"/>
+                <a:cs typeface="Courier New" pitchFamily="34" charset="-120"/>
+              </a:rPr>
+              <a:t>Mountain — 20 sec</a:t>
+            </a:r>
+            <a:endParaRPr lang="en-US" sz="1100" dirty="0"/>
+          </a:p>
+        </p:txBody>
+      </p:sp>
+      <p:sp>
+        <p:nvSpPr>
+          <p:cNvPr id="13" name="Text 11"/>
           <p:cNvSpPr/>
           <p:nvPr/>
         </p:nvSpPr>
@@ -4560,7 +5175,7 @@
                 <a:ea typeface="Georgia" pitchFamily="34" charset="-122"/>
                 <a:cs typeface="Georgia" pitchFamily="34" charset="-120"/>
               </a:rPr>
-              <a:t>Homework</a:t>
+              <a:t>Practice the flow (18 min) (cont.)</a:t>
             </a:r>
             <a:endParaRPr lang="en-US" sz="1800" dirty="0"/>
           </a:p>
@@ -4608,7 +5223,7 @@
                 <a:ea typeface="Verdana" pitchFamily="34" charset="-122"/>
                 <a:cs typeface="Verdana" pitchFamily="34" charset="-120"/>
               </a:rPr>
-              <a:t>– Practice the full sequence at home — your favourite part TWICE.</a:t>
+              <a:t>Total: about 4 min per round.</a:t>
             </a:r>
             <a:endParaRPr lang="en-US" sz="1200" dirty="0"/>
           </a:p>
@@ -4617,6 +5232,102 @@
       <p:sp>
         <p:nvSpPr>
           <p:cNvPr id="5" name="Text 3"/>
+          <p:cNvSpPr/>
+          <p:nvPr/>
+        </p:nvSpPr>
+        <p:spPr>
+          <a:xfrm>
+            <a:off x="406301" y="1160413"/>
+            <a:ext cx="8498026" cy="213271"/>
+          </a:xfrm>
+          <a:prstGeom prst="rect">
+            <a:avLst/>
+          </a:prstGeom>
+          <a:noFill/>
+          <a:ln/>
+        </p:spPr>
+        <p:txBody>
+          <a:bodyPr wrap="square" lIns="0" tIns="0" rIns="0" bIns="0" rtlCol="0" anchor="t"/>
+          <a:lstStyle/>
+          <a:p>
+            <a:pPr algn="l" indent="0" marL="0">
+              <a:lnSpc>
+                <a:spcPts val="1680"/>
+              </a:lnSpc>
+              <a:spcBef>
+                <a:spcPts val="300"/>
+              </a:spcBef>
+              <a:spcAft>
+                <a:spcPts val="300"/>
+              </a:spcAft>
+              <a:buNone/>
+            </a:pPr>
+            <a:r>
+              <a:rPr lang="en-US" sz="1200" dirty="0">
+                <a:solidFill>
+                  <a:srgbClr val="2C2C2C"/>
+                </a:solidFill>
+                <a:latin typeface="Verdana" pitchFamily="34" charset="0"/>
+                <a:ea typeface="Verdana" pitchFamily="34" charset="-122"/>
+                <a:cs typeface="Verdana" pitchFamily="34" charset="-120"/>
+              </a:rPr>
+              <a:t>Round 2: slightly faster, children leading themselves.</a:t>
+            </a:r>
+            <a:endParaRPr lang="en-US" sz="1200" dirty="0"/>
+          </a:p>
+        </p:txBody>
+      </p:sp>
+      <p:sp>
+        <p:nvSpPr>
+          <p:cNvPr id="6" name="Text 4"/>
+          <p:cNvSpPr/>
+          <p:nvPr/>
+        </p:nvSpPr>
+        <p:spPr>
+          <a:xfrm>
+            <a:off x="406301" y="1449884"/>
+            <a:ext cx="8498026" cy="213271"/>
+          </a:xfrm>
+          <a:prstGeom prst="rect">
+            <a:avLst/>
+          </a:prstGeom>
+          <a:noFill/>
+          <a:ln/>
+        </p:spPr>
+        <p:txBody>
+          <a:bodyPr wrap="square" lIns="0" tIns="0" rIns="0" bIns="0" rtlCol="0" anchor="t"/>
+          <a:lstStyle/>
+          <a:p>
+            <a:pPr algn="l" indent="0" marL="0">
+              <a:lnSpc>
+                <a:spcPts val="1680"/>
+              </a:lnSpc>
+              <a:spcBef>
+                <a:spcPts val="300"/>
+              </a:spcBef>
+              <a:spcAft>
+                <a:spcPts val="300"/>
+              </a:spcAft>
+              <a:buNone/>
+            </a:pPr>
+            <a:r>
+              <a:rPr lang="en-US" sz="1200" dirty="0">
+                <a:solidFill>
+                  <a:srgbClr val="2C2C2C"/>
+                </a:solidFill>
+                <a:latin typeface="Verdana" pitchFamily="34" charset="0"/>
+                <a:ea typeface="Verdana" pitchFamily="34" charset="-122"/>
+                <a:cs typeface="Verdana" pitchFamily="34" charset="-120"/>
+              </a:rPr>
+              <a:t>Optional Round 3: a brave child volunteers to call out the sequence.</a:t>
+            </a:r>
+            <a:endParaRPr lang="en-US" sz="1200" dirty="0"/>
+          </a:p>
+        </p:txBody>
+      </p:sp>
+      <p:sp>
+        <p:nvSpPr>
+          <p:cNvPr id="7" name="Text 5"/>
           <p:cNvSpPr/>
           <p:nvPr/>
         </p:nvSpPr>
